--- a/probability_and_statistics/3_probability/probability-2-Rules-1-addition.pptx
+++ b/probability_and_statistics/3_probability/probability-2-Rules-1-addition.pptx
@@ -232,7 +232,7 @@
           <a:p>
             <a:fld id="{7BAEECA8-D063-486F-AE31-5020270C1449}" type="datetimeFigureOut">
               <a:rPr lang="en-US" smtClean="0"/>
-              <a:t>2/28/2026</a:t>
+              <a:t>4/29/2026</a:t>
             </a:fld>
             <a:endParaRPr lang="en-US"/>
           </a:p>
@@ -3997,7 +3997,7 @@
           <a:p>
             <a:fld id="{22B04693-6424-47C2-B763-AEA4CC3DEB22}" type="datetimeFigureOut">
               <a:rPr lang="en-US" smtClean="0"/>
-              <a:t>2/28/2026</a:t>
+              <a:t>4/29/2026</a:t>
             </a:fld>
             <a:endParaRPr lang="en-US"/>
           </a:p>
@@ -6007,7 +6007,7 @@
           <a:p>
             <a:fld id="{6383FAE1-13DE-4511-8C1B-C8AFB720664C}" type="datetimeFigureOut">
               <a:rPr lang="en-US" smtClean="0"/>
-              <a:t>2/28/2026</a:t>
+              <a:t>4/29/2026</a:t>
             </a:fld>
             <a:endParaRPr lang="en-US"/>
           </a:p>
@@ -6205,7 +6205,7 @@
           <a:p>
             <a:fld id="{6383FAE1-13DE-4511-8C1B-C8AFB720664C}" type="datetimeFigureOut">
               <a:rPr lang="en-US" smtClean="0"/>
-              <a:t>2/28/2026</a:t>
+              <a:t>4/29/2026</a:t>
             </a:fld>
             <a:endParaRPr lang="en-US"/>
           </a:p>
@@ -6413,7 +6413,7 @@
           <a:p>
             <a:fld id="{6383FAE1-13DE-4511-8C1B-C8AFB720664C}" type="datetimeFigureOut">
               <a:rPr lang="en-US" smtClean="0"/>
-              <a:t>2/28/2026</a:t>
+              <a:t>4/29/2026</a:t>
             </a:fld>
             <a:endParaRPr lang="en-US"/>
           </a:p>
@@ -6611,7 +6611,7 @@
           <a:p>
             <a:fld id="{6383FAE1-13DE-4511-8C1B-C8AFB720664C}" type="datetimeFigureOut">
               <a:rPr lang="en-US" smtClean="0"/>
-              <a:t>2/28/2026</a:t>
+              <a:t>4/29/2026</a:t>
             </a:fld>
             <a:endParaRPr lang="en-US"/>
           </a:p>
@@ -6886,7 +6886,7 @@
           <a:p>
             <a:fld id="{6383FAE1-13DE-4511-8C1B-C8AFB720664C}" type="datetimeFigureOut">
               <a:rPr lang="en-US" smtClean="0"/>
-              <a:t>2/28/2026</a:t>
+              <a:t>4/29/2026</a:t>
             </a:fld>
             <a:endParaRPr lang="en-US"/>
           </a:p>
@@ -7151,7 +7151,7 @@
           <a:p>
             <a:fld id="{6383FAE1-13DE-4511-8C1B-C8AFB720664C}" type="datetimeFigureOut">
               <a:rPr lang="en-US" smtClean="0"/>
-              <a:t>2/28/2026</a:t>
+              <a:t>4/29/2026</a:t>
             </a:fld>
             <a:endParaRPr lang="en-US"/>
           </a:p>
@@ -7563,7 +7563,7 @@
           <a:p>
             <a:fld id="{6383FAE1-13DE-4511-8C1B-C8AFB720664C}" type="datetimeFigureOut">
               <a:rPr lang="en-US" smtClean="0"/>
-              <a:t>2/28/2026</a:t>
+              <a:t>4/29/2026</a:t>
             </a:fld>
             <a:endParaRPr lang="en-US"/>
           </a:p>
@@ -7704,7 +7704,7 @@
           <a:p>
             <a:fld id="{6383FAE1-13DE-4511-8C1B-C8AFB720664C}" type="datetimeFigureOut">
               <a:rPr lang="en-US" smtClean="0"/>
-              <a:t>2/28/2026</a:t>
+              <a:t>4/29/2026</a:t>
             </a:fld>
             <a:endParaRPr lang="en-US"/>
           </a:p>
@@ -7817,7 +7817,7 @@
           <a:p>
             <a:fld id="{6383FAE1-13DE-4511-8C1B-C8AFB720664C}" type="datetimeFigureOut">
               <a:rPr lang="en-US" smtClean="0"/>
-              <a:t>2/28/2026</a:t>
+              <a:t>4/29/2026</a:t>
             </a:fld>
             <a:endParaRPr lang="en-US"/>
           </a:p>
@@ -8128,7 +8128,7 @@
           <a:p>
             <a:fld id="{6383FAE1-13DE-4511-8C1B-C8AFB720664C}" type="datetimeFigureOut">
               <a:rPr lang="en-US" smtClean="0"/>
-              <a:t>2/28/2026</a:t>
+              <a:t>4/29/2026</a:t>
             </a:fld>
             <a:endParaRPr lang="en-US"/>
           </a:p>
@@ -8419,7 +8419,7 @@
           <a:p>
             <a:fld id="{6383FAE1-13DE-4511-8C1B-C8AFB720664C}" type="datetimeFigureOut">
               <a:rPr lang="en-US" smtClean="0"/>
-              <a:t>2/28/2026</a:t>
+              <a:t>4/29/2026</a:t>
             </a:fld>
             <a:endParaRPr lang="en-US"/>
           </a:p>
@@ -8663,7 +8663,7 @@
           <a:p>
             <a:fld id="{6383FAE1-13DE-4511-8C1B-C8AFB720664C}" type="datetimeFigureOut">
               <a:rPr lang="en-US" smtClean="0"/>
-              <a:t>2/28/2026</a:t>
+              <a:t>4/29/2026</a:t>
             </a:fld>
             <a:endParaRPr lang="en-US"/>
           </a:p>
@@ -9842,7 +9842,19 @@
                         </a:solidFill>
                         <a:latin typeface="Cambria Math" panose="02040503050406030204" pitchFamily="18" charset="0"/>
                       </a:rPr>
-                      <m:t>=6</m:t>
+                      <m:t>=</m:t>
+                    </m:r>
+                    <m:r>
+                      <a:rPr lang="en-US">
+                        <a:solidFill>
+                          <a:schemeClr val="accent6">
+                            <a:lumMod val="60000"/>
+                            <a:lumOff val="40000"/>
+                          </a:schemeClr>
+                        </a:solidFill>
+                        <a:latin typeface="Cambria Math" panose="02040503050406030204" pitchFamily="18" charset="0"/>
+                      </a:rPr>
+                      <m:t>6</m:t>
                     </m:r>
                   </m:oMath>
                 </a14:m>
@@ -9927,7 +9939,19 @@
                         </a:solidFill>
                         <a:latin typeface="Cambria Math" panose="02040503050406030204" pitchFamily="18" charset="0"/>
                       </a:rPr>
-                      <m:t>=7</m:t>
+                      <m:t>=</m:t>
+                    </m:r>
+                    <m:r>
+                      <a:rPr lang="en-US">
+                        <a:solidFill>
+                          <a:schemeClr val="accent6">
+                            <a:lumMod val="60000"/>
+                            <a:lumOff val="40000"/>
+                          </a:schemeClr>
+                        </a:solidFill>
+                        <a:latin typeface="Cambria Math" panose="02040503050406030204" pitchFamily="18" charset="0"/>
+                      </a:rPr>
+                      <m:t>7</m:t>
                     </m:r>
                   </m:oMath>
                 </a14:m>
@@ -10023,7 +10047,19 @@
                         </a:solidFill>
                         <a:latin typeface="Cambria Math" panose="02040503050406030204" pitchFamily="18" charset="0"/>
                       </a:rPr>
-                      <m:t>=6</m:t>
+                      <m:t>=</m:t>
+                    </m:r>
+                    <m:r>
+                      <a:rPr lang="en-US">
+                        <a:solidFill>
+                          <a:schemeClr val="accent6">
+                            <a:lumMod val="60000"/>
+                            <a:lumOff val="40000"/>
+                          </a:schemeClr>
+                        </a:solidFill>
+                        <a:latin typeface="Cambria Math" panose="02040503050406030204" pitchFamily="18" charset="0"/>
+                      </a:rPr>
+                      <m:t>6</m:t>
                     </m:r>
                   </m:oMath>
                 </a14:m>
@@ -10073,7 +10109,19 @@
                         </a:solidFill>
                         <a:latin typeface="Cambria Math" panose="02040503050406030204" pitchFamily="18" charset="0"/>
                       </a:rPr>
-                      <m:t>=7</m:t>
+                      <m:t>=</m:t>
+                    </m:r>
+                    <m:r>
+                      <a:rPr lang="en-US">
+                        <a:solidFill>
+                          <a:schemeClr val="accent6">
+                            <a:lumMod val="60000"/>
+                            <a:lumOff val="40000"/>
+                          </a:schemeClr>
+                        </a:solidFill>
+                        <a:latin typeface="Cambria Math" panose="02040503050406030204" pitchFamily="18" charset="0"/>
+                      </a:rPr>
+                      <m:t>7</m:t>
                     </m:r>
                   </m:oMath>
                 </a14:m>
@@ -10328,7 +10376,31 @@
                           </a:solidFill>
                           <a:latin typeface="Cambria Math" panose="02040503050406030204" pitchFamily="18" charset="0"/>
                         </a:rPr>
-                        <m:t>0.6</m:t>
+                        <m:t>0</m:t>
+                      </m:r>
+                      <m:r>
+                        <a:rPr lang="en-US">
+                          <a:solidFill>
+                            <a:schemeClr val="accent6">
+                              <a:lumMod val="60000"/>
+                              <a:lumOff val="40000"/>
+                            </a:schemeClr>
+                          </a:solidFill>
+                          <a:latin typeface="Cambria Math" panose="02040503050406030204" pitchFamily="18" charset="0"/>
+                        </a:rPr>
+                        <m:t>.</m:t>
+                      </m:r>
+                      <m:r>
+                        <a:rPr lang="en-US">
+                          <a:solidFill>
+                            <a:schemeClr val="accent6">
+                              <a:lumMod val="60000"/>
+                              <a:lumOff val="40000"/>
+                            </a:schemeClr>
+                          </a:solidFill>
+                          <a:latin typeface="Cambria Math" panose="02040503050406030204" pitchFamily="18" charset="0"/>
+                        </a:rPr>
+                        <m:t>6</m:t>
                       </m:r>
                     </m:oMath>
                   </m:oMathPara>
@@ -10389,7 +10461,19 @@
                         </a:solidFill>
                         <a:latin typeface="Cambria Math" panose="02040503050406030204" pitchFamily="18" charset="0"/>
                       </a:rPr>
-                      <m:t>&lt;7</m:t>
+                      <m:t>&lt;</m:t>
+                    </m:r>
+                    <m:r>
+                      <a:rPr lang="en-US">
+                        <a:solidFill>
+                          <a:schemeClr val="accent6">
+                            <a:lumMod val="60000"/>
+                            <a:lumOff val="40000"/>
+                          </a:schemeClr>
+                        </a:solidFill>
+                        <a:latin typeface="Cambria Math" panose="02040503050406030204" pitchFamily="18" charset="0"/>
+                      </a:rPr>
+                      <m:t>7</m:t>
                     </m:r>
                   </m:oMath>
                 </a14:m>
@@ -10570,7 +10654,31 @@
                           </a:solidFill>
                           <a:latin typeface="Cambria Math" panose="02040503050406030204" pitchFamily="18" charset="0"/>
                         </a:rPr>
-                        <m:t>=0.</m:t>
+                        <m:t>=</m:t>
+                      </m:r>
+                      <m:r>
+                        <a:rPr lang="en-US">
+                          <a:solidFill>
+                            <a:schemeClr val="accent6">
+                              <a:lumMod val="60000"/>
+                              <a:lumOff val="40000"/>
+                            </a:schemeClr>
+                          </a:solidFill>
+                          <a:latin typeface="Cambria Math" panose="02040503050406030204" pitchFamily="18" charset="0"/>
+                        </a:rPr>
+                        <m:t>0</m:t>
+                      </m:r>
+                      <m:r>
+                        <a:rPr lang="en-US">
+                          <a:solidFill>
+                            <a:schemeClr val="accent6">
+                              <a:lumMod val="60000"/>
+                              <a:lumOff val="40000"/>
+                            </a:schemeClr>
+                          </a:solidFill>
+                          <a:latin typeface="Cambria Math" panose="02040503050406030204" pitchFamily="18" charset="0"/>
+                        </a:rPr>
+                        <m:t>.</m:t>
                       </m:r>
                       <m:r>
                         <a:rPr lang="en-US" b="0" i="0" smtClean="0">
@@ -10653,7 +10761,19 @@
                         </a:solidFill>
                         <a:latin typeface="Cambria Math" panose="02040503050406030204" pitchFamily="18" charset="0"/>
                       </a:rPr>
-                      <m:t>&lt;6</m:t>
+                      <m:t>&lt;</m:t>
+                    </m:r>
+                    <m:r>
+                      <a:rPr lang="en-US" b="0">
+                        <a:solidFill>
+                          <a:schemeClr val="accent6">
+                            <a:lumMod val="60000"/>
+                            <a:lumOff val="40000"/>
+                          </a:schemeClr>
+                        </a:solidFill>
+                        <a:latin typeface="Cambria Math" panose="02040503050406030204" pitchFamily="18" charset="0"/>
+                      </a:rPr>
+                      <m:t>6</m:t>
                     </m:r>
                   </m:oMath>
                 </a14:m>
@@ -10692,7 +10812,19 @@
                         </a:solidFill>
                         <a:latin typeface="Cambria Math" panose="02040503050406030204" pitchFamily="18" charset="0"/>
                       </a:rPr>
-                      <m:t>&lt;7</m:t>
+                      <m:t>&lt;</m:t>
+                    </m:r>
+                    <m:r>
+                      <a:rPr lang="en-US" b="0">
+                        <a:solidFill>
+                          <a:schemeClr val="accent6">
+                            <a:lumMod val="60000"/>
+                            <a:lumOff val="40000"/>
+                          </a:schemeClr>
+                        </a:solidFill>
+                        <a:latin typeface="Cambria Math" panose="02040503050406030204" pitchFamily="18" charset="0"/>
+                      </a:rPr>
+                      <m:t>7</m:t>
                     </m:r>
                   </m:oMath>
                 </a14:m>
@@ -10903,7 +11035,31 @@
                           </a:solidFill>
                           <a:latin typeface="Cambria Math" panose="02040503050406030204" pitchFamily="18" charset="0"/>
                         </a:rPr>
-                        <m:t>=0.</m:t>
+                        <m:t>=</m:t>
+                      </m:r>
+                      <m:r>
+                        <a:rPr lang="en-US">
+                          <a:solidFill>
+                            <a:schemeClr val="accent6">
+                              <a:lumMod val="60000"/>
+                              <a:lumOff val="40000"/>
+                            </a:schemeClr>
+                          </a:solidFill>
+                          <a:latin typeface="Cambria Math" panose="02040503050406030204" pitchFamily="18" charset="0"/>
+                        </a:rPr>
+                        <m:t>0</m:t>
+                      </m:r>
+                      <m:r>
+                        <a:rPr lang="en-US">
+                          <a:solidFill>
+                            <a:schemeClr val="accent6">
+                              <a:lumMod val="60000"/>
+                              <a:lumOff val="40000"/>
+                            </a:schemeClr>
+                          </a:solidFill>
+                          <a:latin typeface="Cambria Math" panose="02040503050406030204" pitchFamily="18" charset="0"/>
+                        </a:rPr>
+                        <m:t>.</m:t>
                       </m:r>
                       <m:r>
                         <a:rPr lang="en-US" b="0" i="0" smtClean="0">
@@ -13861,8 +14017,8 @@
           </a:p>
         </p:txBody>
       </p:sp>
-      <mc:AlternateContent xmlns:mc="http://schemas.openxmlformats.org/markup-compatibility/2006">
-        <mc:Choice xmlns:a14="http://schemas.microsoft.com/office/drawing/2010/main" Requires="a14">
+      <mc:AlternateContent xmlns:mc="http://schemas.openxmlformats.org/markup-compatibility/2006" xmlns:a14="http://schemas.microsoft.com/office/drawing/2010/main">
+        <mc:Choice Requires="a14">
           <p:sp>
             <p:nvSpPr>
               <p:cNvPr id="7" name="TextBox 6">
@@ -14280,7 +14436,7 @@
             </p:txBody>
           </p:sp>
         </mc:Choice>
-        <mc:Fallback>
+        <mc:Fallback xmlns="">
           <p:sp>
             <p:nvSpPr>
               <p:cNvPr id="7" name="TextBox 6">
@@ -14325,8 +14481,8 @@
           </p:sp>
         </mc:Fallback>
       </mc:AlternateContent>
-      <mc:AlternateContent xmlns:mc="http://schemas.openxmlformats.org/markup-compatibility/2006">
-        <mc:Choice xmlns:p14="http://schemas.microsoft.com/office/powerpoint/2010/main" Requires="p14">
+      <mc:AlternateContent xmlns:mc="http://schemas.openxmlformats.org/markup-compatibility/2006" xmlns:p14="http://schemas.microsoft.com/office/powerpoint/2010/main">
+        <mc:Choice Requires="p14">
           <p:contentPart p14:bwMode="auto" r:id="rId4">
             <p14:nvContentPartPr>
               <p14:cNvPr id="6" name="Ink 5">
@@ -14345,7 +14501,7 @@
             </p14:xfrm>
           </p:contentPart>
         </mc:Choice>
-        <mc:Fallback>
+        <mc:Fallback xmlns="">
           <p:pic>
             <p:nvPicPr>
               <p:cNvPr id="6" name="Ink 5">
@@ -14426,8 +14582,8 @@
             <a:chExt cx="1386360" cy="1499040"/>
           </a:xfrm>
         </p:grpSpPr>
-        <mc:AlternateContent xmlns:mc="http://schemas.openxmlformats.org/markup-compatibility/2006">
-          <mc:Choice xmlns:p14="http://schemas.microsoft.com/office/powerpoint/2010/main" Requires="p14">
+        <mc:AlternateContent xmlns:mc="http://schemas.openxmlformats.org/markup-compatibility/2006" xmlns:p14="http://schemas.microsoft.com/office/powerpoint/2010/main">
+          <mc:Choice Requires="p14">
             <p:contentPart p14:bwMode="auto" r:id="rId7">
               <p14:nvContentPartPr>
                 <p14:cNvPr id="5" name="Ink 4">
@@ -14446,7 +14602,7 @@
               </p14:xfrm>
             </p:contentPart>
           </mc:Choice>
-          <mc:Fallback>
+          <mc:Fallback xmlns="">
             <p:pic>
               <p:nvPicPr>
                 <p:cNvPr id="5" name="Ink 4">
@@ -14477,8 +14633,8 @@
             </p:pic>
           </mc:Fallback>
         </mc:AlternateContent>
-        <mc:AlternateContent xmlns:mc="http://schemas.openxmlformats.org/markup-compatibility/2006">
-          <mc:Choice xmlns:p14="http://schemas.microsoft.com/office/powerpoint/2010/main" Requires="p14">
+        <mc:AlternateContent xmlns:mc="http://schemas.openxmlformats.org/markup-compatibility/2006" xmlns:p14="http://schemas.microsoft.com/office/powerpoint/2010/main">
+          <mc:Choice Requires="p14">
             <p:contentPart p14:bwMode="auto" r:id="rId9">
               <p14:nvContentPartPr>
                 <p14:cNvPr id="8" name="Ink 7">
@@ -14497,7 +14653,7 @@
               </p14:xfrm>
             </p:contentPart>
           </mc:Choice>
-          <mc:Fallback>
+          <mc:Fallback xmlns="">
             <p:pic>
               <p:nvPicPr>
                 <p:cNvPr id="8" name="Ink 7">
@@ -14528,8 +14684,8 @@
             </p:pic>
           </mc:Fallback>
         </mc:AlternateContent>
-        <mc:AlternateContent xmlns:mc="http://schemas.openxmlformats.org/markup-compatibility/2006">
-          <mc:Choice xmlns:p14="http://schemas.microsoft.com/office/powerpoint/2010/main" Requires="p14">
+        <mc:AlternateContent xmlns:mc="http://schemas.openxmlformats.org/markup-compatibility/2006" xmlns:p14="http://schemas.microsoft.com/office/powerpoint/2010/main">
+          <mc:Choice Requires="p14">
             <p:contentPart p14:bwMode="auto" r:id="rId11">
               <p14:nvContentPartPr>
                 <p14:cNvPr id="9" name="Ink 8">
@@ -14548,7 +14704,7 @@
               </p14:xfrm>
             </p:contentPart>
           </mc:Choice>
-          <mc:Fallback>
+          <mc:Fallback xmlns="">
             <p:pic>
               <p:nvPicPr>
                 <p:cNvPr id="9" name="Ink 8">
@@ -14579,8 +14735,8 @@
             </p:pic>
           </mc:Fallback>
         </mc:AlternateContent>
-        <mc:AlternateContent xmlns:mc="http://schemas.openxmlformats.org/markup-compatibility/2006">
-          <mc:Choice xmlns:p14="http://schemas.microsoft.com/office/powerpoint/2010/main" Requires="p14">
+        <mc:AlternateContent xmlns:mc="http://schemas.openxmlformats.org/markup-compatibility/2006" xmlns:p14="http://schemas.microsoft.com/office/powerpoint/2010/main">
+          <mc:Choice Requires="p14">
             <p:contentPart p14:bwMode="auto" r:id="rId13">
               <p14:nvContentPartPr>
                 <p14:cNvPr id="11" name="Ink 10">
@@ -14599,7 +14755,7 @@
               </p14:xfrm>
             </p:contentPart>
           </mc:Choice>
-          <mc:Fallback>
+          <mc:Fallback xmlns="">
             <p:pic>
               <p:nvPicPr>
                 <p:cNvPr id="11" name="Ink 10">
@@ -14630,8 +14786,8 @@
             </p:pic>
           </mc:Fallback>
         </mc:AlternateContent>
-        <mc:AlternateContent xmlns:mc="http://schemas.openxmlformats.org/markup-compatibility/2006">
-          <mc:Choice xmlns:p14="http://schemas.microsoft.com/office/powerpoint/2010/main" Requires="p14">
+        <mc:AlternateContent xmlns:mc="http://schemas.openxmlformats.org/markup-compatibility/2006" xmlns:p14="http://schemas.microsoft.com/office/powerpoint/2010/main">
+          <mc:Choice Requires="p14">
             <p:contentPart p14:bwMode="auto" r:id="rId15">
               <p14:nvContentPartPr>
                 <p14:cNvPr id="14" name="Ink 13">
@@ -14650,7 +14806,7 @@
               </p14:xfrm>
             </p:contentPart>
           </mc:Choice>
-          <mc:Fallback>
+          <mc:Fallback xmlns="">
             <p:pic>
               <p:nvPicPr>
                 <p:cNvPr id="14" name="Ink 13">
@@ -14681,8 +14837,8 @@
             </p:pic>
           </mc:Fallback>
         </mc:AlternateContent>
-        <mc:AlternateContent xmlns:mc="http://schemas.openxmlformats.org/markup-compatibility/2006">
-          <mc:Choice xmlns:p14="http://schemas.microsoft.com/office/powerpoint/2010/main" Requires="p14">
+        <mc:AlternateContent xmlns:mc="http://schemas.openxmlformats.org/markup-compatibility/2006" xmlns:p14="http://schemas.microsoft.com/office/powerpoint/2010/main">
+          <mc:Choice Requires="p14">
             <p:contentPart p14:bwMode="auto" r:id="rId17">
               <p14:nvContentPartPr>
                 <p14:cNvPr id="15" name="Ink 14">
@@ -14701,7 +14857,7 @@
               </p14:xfrm>
             </p:contentPart>
           </mc:Choice>
-          <mc:Fallback>
+          <mc:Fallback xmlns="">
             <p:pic>
               <p:nvPicPr>
                 <p:cNvPr id="15" name="Ink 14">
@@ -14732,8 +14888,8 @@
             </p:pic>
           </mc:Fallback>
         </mc:AlternateContent>
-        <mc:AlternateContent xmlns:mc="http://schemas.openxmlformats.org/markup-compatibility/2006">
-          <mc:Choice xmlns:p14="http://schemas.microsoft.com/office/powerpoint/2010/main" Requires="p14">
+        <mc:AlternateContent xmlns:mc="http://schemas.openxmlformats.org/markup-compatibility/2006" xmlns:p14="http://schemas.microsoft.com/office/powerpoint/2010/main">
+          <mc:Choice Requires="p14">
             <p:contentPart p14:bwMode="auto" r:id="rId19">
               <p14:nvContentPartPr>
                 <p14:cNvPr id="16" name="Ink 15">
@@ -14752,7 +14908,7 @@
               </p14:xfrm>
             </p:contentPart>
           </mc:Choice>
-          <mc:Fallback>
+          <mc:Fallback xmlns="">
             <p:pic>
               <p:nvPicPr>
                 <p:cNvPr id="16" name="Ink 15">
@@ -14783,8 +14939,8 @@
             </p:pic>
           </mc:Fallback>
         </mc:AlternateContent>
-        <mc:AlternateContent xmlns:mc="http://schemas.openxmlformats.org/markup-compatibility/2006">
-          <mc:Choice xmlns:p14="http://schemas.microsoft.com/office/powerpoint/2010/main" Requires="p14">
+        <mc:AlternateContent xmlns:mc="http://schemas.openxmlformats.org/markup-compatibility/2006" xmlns:p14="http://schemas.microsoft.com/office/powerpoint/2010/main">
+          <mc:Choice Requires="p14">
             <p:contentPart p14:bwMode="auto" r:id="rId21">
               <p14:nvContentPartPr>
                 <p14:cNvPr id="17" name="Ink 16">
@@ -14803,7 +14959,7 @@
               </p14:xfrm>
             </p:contentPart>
           </mc:Choice>
-          <mc:Fallback>
+          <mc:Fallback xmlns="">
             <p:pic>
               <p:nvPicPr>
                 <p:cNvPr id="17" name="Ink 16">
@@ -14834,8 +14990,8 @@
             </p:pic>
           </mc:Fallback>
         </mc:AlternateContent>
-        <mc:AlternateContent xmlns:mc="http://schemas.openxmlformats.org/markup-compatibility/2006">
-          <mc:Choice xmlns:p14="http://schemas.microsoft.com/office/powerpoint/2010/main" Requires="p14">
+        <mc:AlternateContent xmlns:mc="http://schemas.openxmlformats.org/markup-compatibility/2006" xmlns:p14="http://schemas.microsoft.com/office/powerpoint/2010/main">
+          <mc:Choice Requires="p14">
             <p:contentPart p14:bwMode="auto" r:id="rId23">
               <p14:nvContentPartPr>
                 <p14:cNvPr id="18" name="Ink 17">
@@ -14854,7 +15010,7 @@
               </p14:xfrm>
             </p:contentPart>
           </mc:Choice>
-          <mc:Fallback>
+          <mc:Fallback xmlns="">
             <p:pic>
               <p:nvPicPr>
                 <p:cNvPr id="18" name="Ink 17">
@@ -14885,8 +15041,8 @@
             </p:pic>
           </mc:Fallback>
         </mc:AlternateContent>
-        <mc:AlternateContent xmlns:mc="http://schemas.openxmlformats.org/markup-compatibility/2006">
-          <mc:Choice xmlns:p14="http://schemas.microsoft.com/office/powerpoint/2010/main" Requires="p14">
+        <mc:AlternateContent xmlns:mc="http://schemas.openxmlformats.org/markup-compatibility/2006" xmlns:p14="http://schemas.microsoft.com/office/powerpoint/2010/main">
+          <mc:Choice Requires="p14">
             <p:contentPart p14:bwMode="auto" r:id="rId25">
               <p14:nvContentPartPr>
                 <p14:cNvPr id="19" name="Ink 18">
@@ -14905,7 +15061,7 @@
               </p14:xfrm>
             </p:contentPart>
           </mc:Choice>
-          <mc:Fallback>
+          <mc:Fallback xmlns="">
             <p:pic>
               <p:nvPicPr>
                 <p:cNvPr id="19" name="Ink 18">
@@ -14936,8 +15092,8 @@
             </p:pic>
           </mc:Fallback>
         </mc:AlternateContent>
-        <mc:AlternateContent xmlns:mc="http://schemas.openxmlformats.org/markup-compatibility/2006">
-          <mc:Choice xmlns:p14="http://schemas.microsoft.com/office/powerpoint/2010/main" Requires="p14">
+        <mc:AlternateContent xmlns:mc="http://schemas.openxmlformats.org/markup-compatibility/2006" xmlns:p14="http://schemas.microsoft.com/office/powerpoint/2010/main">
+          <mc:Choice Requires="p14">
             <p:contentPart p14:bwMode="auto" r:id="rId27">
               <p14:nvContentPartPr>
                 <p14:cNvPr id="20" name="Ink 19">
@@ -14956,7 +15112,7 @@
               </p14:xfrm>
             </p:contentPart>
           </mc:Choice>
-          <mc:Fallback>
+          <mc:Fallback xmlns="">
             <p:pic>
               <p:nvPicPr>
                 <p:cNvPr id="20" name="Ink 19">
@@ -14987,8 +15143,8 @@
             </p:pic>
           </mc:Fallback>
         </mc:AlternateContent>
-        <mc:AlternateContent xmlns:mc="http://schemas.openxmlformats.org/markup-compatibility/2006">
-          <mc:Choice xmlns:p14="http://schemas.microsoft.com/office/powerpoint/2010/main" Requires="p14">
+        <mc:AlternateContent xmlns:mc="http://schemas.openxmlformats.org/markup-compatibility/2006" xmlns:p14="http://schemas.microsoft.com/office/powerpoint/2010/main">
+          <mc:Choice Requires="p14">
             <p:contentPart p14:bwMode="auto" r:id="rId29">
               <p14:nvContentPartPr>
                 <p14:cNvPr id="21" name="Ink 20">
@@ -15007,7 +15163,7 @@
               </p14:xfrm>
             </p:contentPart>
           </mc:Choice>
-          <mc:Fallback>
+          <mc:Fallback xmlns="">
             <p:pic>
               <p:nvPicPr>
                 <p:cNvPr id="21" name="Ink 20">
@@ -15038,8 +15194,8 @@
             </p:pic>
           </mc:Fallback>
         </mc:AlternateContent>
-        <mc:AlternateContent xmlns:mc="http://schemas.openxmlformats.org/markup-compatibility/2006">
-          <mc:Choice xmlns:p14="http://schemas.microsoft.com/office/powerpoint/2010/main" Requires="p14">
+        <mc:AlternateContent xmlns:mc="http://schemas.openxmlformats.org/markup-compatibility/2006" xmlns:p14="http://schemas.microsoft.com/office/powerpoint/2010/main">
+          <mc:Choice Requires="p14">
             <p:contentPart p14:bwMode="auto" r:id="rId31">
               <p14:nvContentPartPr>
                 <p14:cNvPr id="22" name="Ink 21">
@@ -15058,7 +15214,7 @@
               </p14:xfrm>
             </p:contentPart>
           </mc:Choice>
-          <mc:Fallback>
+          <mc:Fallback xmlns="">
             <p:pic>
               <p:nvPicPr>
                 <p:cNvPr id="22" name="Ink 21">
@@ -15089,8 +15245,8 @@
             </p:pic>
           </mc:Fallback>
         </mc:AlternateContent>
-        <mc:AlternateContent xmlns:mc="http://schemas.openxmlformats.org/markup-compatibility/2006">
-          <mc:Choice xmlns:p14="http://schemas.microsoft.com/office/powerpoint/2010/main" Requires="p14">
+        <mc:AlternateContent xmlns:mc="http://schemas.openxmlformats.org/markup-compatibility/2006" xmlns:p14="http://schemas.microsoft.com/office/powerpoint/2010/main">
+          <mc:Choice Requires="p14">
             <p:contentPart p14:bwMode="auto" r:id="rId33">
               <p14:nvContentPartPr>
                 <p14:cNvPr id="23" name="Ink 22">
@@ -15109,7 +15265,7 @@
               </p14:xfrm>
             </p:contentPart>
           </mc:Choice>
-          <mc:Fallback>
+          <mc:Fallback xmlns="">
             <p:pic>
               <p:nvPicPr>
                 <p:cNvPr id="23" name="Ink 22">
@@ -15140,8 +15296,8 @@
             </p:pic>
           </mc:Fallback>
         </mc:AlternateContent>
-        <mc:AlternateContent xmlns:mc="http://schemas.openxmlformats.org/markup-compatibility/2006">
-          <mc:Choice xmlns:p14="http://schemas.microsoft.com/office/powerpoint/2010/main" Requires="p14">
+        <mc:AlternateContent xmlns:mc="http://schemas.openxmlformats.org/markup-compatibility/2006" xmlns:p14="http://schemas.microsoft.com/office/powerpoint/2010/main">
+          <mc:Choice Requires="p14">
             <p:contentPart p14:bwMode="auto" r:id="rId35">
               <p14:nvContentPartPr>
                 <p14:cNvPr id="24" name="Ink 23">
@@ -15160,7 +15316,7 @@
               </p14:xfrm>
             </p:contentPart>
           </mc:Choice>
-          <mc:Fallback>
+          <mc:Fallback xmlns="">
             <p:pic>
               <p:nvPicPr>
                 <p:cNvPr id="24" name="Ink 23">
@@ -15191,8 +15347,8 @@
             </p:pic>
           </mc:Fallback>
         </mc:AlternateContent>
-        <mc:AlternateContent xmlns:mc="http://schemas.openxmlformats.org/markup-compatibility/2006">
-          <mc:Choice xmlns:p14="http://schemas.microsoft.com/office/powerpoint/2010/main" Requires="p14">
+        <mc:AlternateContent xmlns:mc="http://schemas.openxmlformats.org/markup-compatibility/2006" xmlns:p14="http://schemas.microsoft.com/office/powerpoint/2010/main">
+          <mc:Choice Requires="p14">
             <p:contentPart p14:bwMode="auto" r:id="rId37">
               <p14:nvContentPartPr>
                 <p14:cNvPr id="25" name="Ink 24">
@@ -15211,7 +15367,7 @@
               </p14:xfrm>
             </p:contentPart>
           </mc:Choice>
-          <mc:Fallback>
+          <mc:Fallback xmlns="">
             <p:pic>
               <p:nvPicPr>
                 <p:cNvPr id="25" name="Ink 24">
@@ -15242,8 +15398,8 @@
             </p:pic>
           </mc:Fallback>
         </mc:AlternateContent>
-        <mc:AlternateContent xmlns:mc="http://schemas.openxmlformats.org/markup-compatibility/2006">
-          <mc:Choice xmlns:p14="http://schemas.microsoft.com/office/powerpoint/2010/main" Requires="p14">
+        <mc:AlternateContent xmlns:mc="http://schemas.openxmlformats.org/markup-compatibility/2006" xmlns:p14="http://schemas.microsoft.com/office/powerpoint/2010/main">
+          <mc:Choice Requires="p14">
             <p:contentPart p14:bwMode="auto" r:id="rId39">
               <p14:nvContentPartPr>
                 <p14:cNvPr id="26" name="Ink 25">
@@ -15262,7 +15418,7 @@
               </p14:xfrm>
             </p:contentPart>
           </mc:Choice>
-          <mc:Fallback>
+          <mc:Fallback xmlns="">
             <p:pic>
               <p:nvPicPr>
                 <p:cNvPr id="26" name="Ink 25">
@@ -15294,8 +15450,8 @@
           </mc:Fallback>
         </mc:AlternateContent>
       </p:grpSp>
-      <mc:AlternateContent xmlns:mc="http://schemas.openxmlformats.org/markup-compatibility/2006">
-        <mc:Choice xmlns:a14="http://schemas.microsoft.com/office/drawing/2010/main" Requires="a14">
+      <mc:AlternateContent xmlns:mc="http://schemas.openxmlformats.org/markup-compatibility/2006" xmlns:a14="http://schemas.microsoft.com/office/drawing/2010/main">
+        <mc:Choice Requires="a14">
           <p:sp>
             <p:nvSpPr>
               <p:cNvPr id="10" name="TextBox 9">
@@ -15375,7 +15531,7 @@
             </p:txBody>
           </p:sp>
         </mc:Choice>
-        <mc:Fallback>
+        <mc:Fallback xmlns="">
           <p:sp>
             <p:nvSpPr>
               <p:cNvPr id="10" name="TextBox 9">
@@ -24973,8 +25129,8 @@
           </a:p>
         </p:txBody>
       </p:sp>
-      <mc:AlternateContent xmlns:mc="http://schemas.openxmlformats.org/markup-compatibility/2006" xmlns:a14="http://schemas.microsoft.com/office/drawing/2010/main">
-        <mc:Choice Requires="a14">
+      <mc:AlternateContent xmlns:mc="http://schemas.openxmlformats.org/markup-compatibility/2006">
+        <mc:Choice xmlns:a14="http://schemas.microsoft.com/office/drawing/2010/main" Requires="a14">
           <p:sp>
             <p:nvSpPr>
               <p:cNvPr id="7" name="TextBox 6">
@@ -25004,7 +25160,7 @@
               <a:lstStyle/>
               <a:p>
                 <a:r>
-                  <a:rPr lang="en-US" b="1" dirty="0">
+                  <a:rPr lang="en-US" sz="2400" b="1" dirty="0">
                     <a:solidFill>
                       <a:schemeClr val="accent6">
                         <a:lumMod val="60000"/>
@@ -25016,7 +25172,7 @@
                 </a:r>
               </a:p>
               <a:p>
-                <a:endParaRPr lang="en-US" b="1" dirty="0">
+                <a:endParaRPr lang="en-US" sz="2400" b="1" dirty="0">
                   <a:solidFill>
                     <a:schemeClr val="accent6">
                       <a:lumMod val="60000"/>
@@ -25028,7 +25184,7 @@
               <a:p>
                 <a:pPr algn="ctr"/>
                 <a:r>
-                  <a:rPr lang="en-US" b="1" dirty="0">
+                  <a:rPr lang="en-US" sz="2400" b="1" dirty="0">
                     <a:solidFill>
                       <a:schemeClr val="accent6">
                         <a:lumMod val="60000"/>
@@ -25041,7 +25197,7 @@
               </a:p>
               <a:p>
                 <a:pPr algn="ctr"/>
-                <a:endParaRPr lang="en-US" b="1" dirty="0">
+                <a:endParaRPr lang="en-US" sz="2400" b="1" dirty="0">
                   <a:solidFill>
                     <a:schemeClr val="accent6">
                       <a:lumMod val="60000"/>
@@ -25053,7 +25209,7 @@
               <a:p>
                 <a:pPr algn="ctr"/>
                 <a:r>
-                  <a:rPr lang="en-US" b="1" dirty="0">
+                  <a:rPr lang="en-US" sz="2400" b="1" dirty="0">
                     <a:solidFill>
                       <a:schemeClr val="accent6">
                         <a:lumMod val="60000"/>
@@ -25066,7 +25222,7 @@
                 <a14:m>
                   <m:oMath xmlns:m="http://schemas.openxmlformats.org/officeDocument/2006/math">
                     <m:r>
-                      <a:rPr lang="en-US" b="1">
+                      <a:rPr lang="en-US" sz="2400" b="1">
                         <a:solidFill>
                           <a:schemeClr val="accent6">
                             <a:lumMod val="60000"/>
@@ -25080,7 +25236,7 @@
                   </m:oMath>
                 </a14:m>
                 <a:r>
-                  <a:rPr lang="en-US" b="1" dirty="0">
+                  <a:rPr lang="en-US" sz="2400" b="1" dirty="0">
                     <a:solidFill>
                       <a:schemeClr val="accent6">
                         <a:lumMod val="60000"/>
@@ -25090,7 +25246,7 @@
                   </a:rPr>
                   <a:t>   B )</a:t>
                 </a:r>
-                <a:endParaRPr lang="en-US" dirty="0">
+                <a:endParaRPr lang="en-US" sz="2400" dirty="0">
                   <a:solidFill>
                     <a:schemeClr val="accent6">
                       <a:lumMod val="60000"/>
@@ -25100,7 +25256,7 @@
                 </a:endParaRPr>
               </a:p>
               <a:p>
-                <a:endParaRPr lang="en-US" dirty="0">
+                <a:endParaRPr lang="en-US" sz="2400" dirty="0">
                   <a:solidFill>
                     <a:schemeClr val="accent6">
                       <a:lumMod val="60000"/>
@@ -25110,7 +25266,7 @@
                 </a:endParaRPr>
               </a:p>
               <a:p>
-                <a:endParaRPr lang="en-US" dirty="0">
+                <a:endParaRPr lang="en-US" sz="2400" dirty="0">
                   <a:solidFill>
                     <a:schemeClr val="accent6">
                       <a:lumMod val="60000"/>
@@ -25120,7 +25276,7 @@
                 </a:endParaRPr>
               </a:p>
               <a:p>
-                <a:endParaRPr lang="en-US" dirty="0">
+                <a:endParaRPr lang="en-US" sz="2400" dirty="0">
                   <a:solidFill>
                     <a:schemeClr val="accent6">
                       <a:lumMod val="60000"/>
@@ -25130,7 +25286,7 @@
                 </a:endParaRPr>
               </a:p>
               <a:p>
-                <a:endParaRPr lang="en-US" dirty="0">
+                <a:endParaRPr lang="en-US" sz="2400" dirty="0">
                   <a:solidFill>
                     <a:schemeClr val="accent6">
                       <a:lumMod val="60000"/>
@@ -25140,7 +25296,7 @@
                 </a:endParaRPr>
               </a:p>
               <a:p>
-                <a:endParaRPr lang="en-US" dirty="0">
+                <a:endParaRPr lang="en-US" sz="2400" dirty="0">
                   <a:solidFill>
                     <a:schemeClr val="accent6">
                       <a:lumMod val="60000"/>
@@ -25150,7 +25306,7 @@
                 </a:endParaRPr>
               </a:p>
               <a:p>
-                <a:endParaRPr lang="en-US" dirty="0">
+                <a:endParaRPr lang="en-US" sz="2400" dirty="0">
                   <a:solidFill>
                     <a:schemeClr val="accent6">
                       <a:lumMod val="60000"/>
@@ -25160,58 +25316,8 @@
                 </a:endParaRPr>
               </a:p>
               <a:p>
-                <a:endParaRPr lang="en-US" dirty="0">
-                  <a:solidFill>
-                    <a:schemeClr val="accent6">
-                      <a:lumMod val="60000"/>
-                      <a:lumOff val="40000"/>
-                    </a:schemeClr>
-                  </a:solidFill>
-                </a:endParaRPr>
-              </a:p>
-              <a:p>
-                <a:endParaRPr lang="en-US" dirty="0">
-                  <a:solidFill>
-                    <a:schemeClr val="accent6">
-                      <a:lumMod val="60000"/>
-                      <a:lumOff val="40000"/>
-                    </a:schemeClr>
-                  </a:solidFill>
-                </a:endParaRPr>
-              </a:p>
-              <a:p>
-                <a:endParaRPr lang="en-US" dirty="0">
-                  <a:solidFill>
-                    <a:schemeClr val="accent6">
-                      <a:lumMod val="60000"/>
-                      <a:lumOff val="40000"/>
-                    </a:schemeClr>
-                  </a:solidFill>
-                </a:endParaRPr>
-              </a:p>
-              <a:p>
-                <a:endParaRPr lang="en-US" dirty="0">
-                  <a:solidFill>
-                    <a:schemeClr val="accent6">
-                      <a:lumMod val="60000"/>
-                      <a:lumOff val="40000"/>
-                    </a:schemeClr>
-                  </a:solidFill>
-                </a:endParaRPr>
-              </a:p>
-              <a:p>
-                <a:endParaRPr lang="en-US" dirty="0">
-                  <a:solidFill>
-                    <a:schemeClr val="accent6">
-                      <a:lumMod val="60000"/>
-                      <a:lumOff val="40000"/>
-                    </a:schemeClr>
-                  </a:solidFill>
-                </a:endParaRPr>
-              </a:p>
-              <a:p>
-                <a:r>
-                  <a:rPr lang="en-US" b="1" dirty="0">
+                <a:r>
+                  <a:rPr lang="en-US" sz="2400" b="1" dirty="0">
                     <a:solidFill>
                       <a:schemeClr val="accent6">
                         <a:lumMod val="60000"/>
@@ -25222,20 +25328,33 @@
                   <a:t>Special case: </a:t>
                 </a:r>
                 <a:r>
-                  <a:rPr lang="en-US" dirty="0">
-                    <a:solidFill>
-                      <a:schemeClr val="accent6">
-                        <a:lumMod val="60000"/>
-                        <a:lumOff val="40000"/>
-                      </a:schemeClr>
-                    </a:solidFill>
-                  </a:rPr>
-                  <a:t>If A and B are disjoint, then P(A </a:t>
+                  <a:rPr lang="en-US" sz="2400" dirty="0">
+                    <a:solidFill>
+                      <a:schemeClr val="accent6">
+                        <a:lumMod val="60000"/>
+                        <a:lumOff val="40000"/>
+                      </a:schemeClr>
+                    </a:solidFill>
+                  </a:rPr>
+                  <a:t>If A and B are disjoint, then </a:t>
+                </a:r>
+              </a:p>
+              <a:p>
+                <a:r>
+                  <a:rPr lang="en-US" sz="2400" dirty="0">
+                    <a:solidFill>
+                      <a:schemeClr val="accent6">
+                        <a:lumMod val="60000"/>
+                        <a:lumOff val="40000"/>
+                      </a:schemeClr>
+                    </a:solidFill>
+                  </a:rPr>
+                  <a:t>P(A </a:t>
                 </a:r>
                 <a14:m>
                   <m:oMath xmlns:m="http://schemas.openxmlformats.org/officeDocument/2006/math">
                     <m:r>
-                      <a:rPr lang="en-US">
+                      <a:rPr lang="en-US" sz="2400">
                         <a:solidFill>
                           <a:schemeClr val="accent6">
                             <a:lumMod val="60000"/>
@@ -25249,7 +25368,7 @@
                   </m:oMath>
                 </a14:m>
                 <a:r>
-                  <a:rPr lang="en-US" dirty="0">
+                  <a:rPr lang="en-US" sz="2400" dirty="0">
                     <a:solidFill>
                       <a:schemeClr val="accent6">
                         <a:lumMod val="60000"/>
@@ -25262,7 +25381,7 @@
               </a:p>
               <a:p>
                 <a:r>
-                  <a:rPr lang="en-US" dirty="0">
+                  <a:rPr lang="en-US" sz="2400" dirty="0">
                     <a:solidFill>
                       <a:schemeClr val="accent6">
                         <a:lumMod val="60000"/>
@@ -25275,7 +25394,7 @@
               </a:p>
               <a:p>
                 <a:r>
-                  <a:rPr lang="en-US" dirty="0">
+                  <a:rPr lang="en-US" sz="2400" dirty="0">
                     <a:solidFill>
                       <a:schemeClr val="accent6">
                         <a:lumMod val="60000"/>
@@ -25285,21 +25404,11 @@
                   </a:rPr>
                   <a:t>P(A U B)  = P(A) + P(B)</a:t>
                 </a:r>
-              </a:p>
-              <a:p>
-                <a:endParaRPr lang="en-US" b="1" dirty="0">
-                  <a:solidFill>
-                    <a:schemeClr val="accent6">
-                      <a:lumMod val="60000"/>
-                      <a:lumOff val="40000"/>
-                    </a:schemeClr>
-                  </a:solidFill>
-                </a:endParaRPr>
               </a:p>
             </p:txBody>
           </p:sp>
         </mc:Choice>
-        <mc:Fallback xmlns="">
+        <mc:Fallback>
           <p:sp>
             <p:nvSpPr>
               <p:cNvPr id="7" name="TextBox 6">
@@ -25325,7 +25434,7 @@
               <a:blipFill>
                 <a:blip r:embed="rId3"/>
                 <a:stretch>
-                  <a:fillRect l="-735" t="-649"/>
+                  <a:fillRect l="-1379" t="-866" b="-1515"/>
                 </a:stretch>
               </a:blipFill>
             </p:spPr>
@@ -26365,8 +26474,8 @@
           </a:p>
         </p:txBody>
       </p:sp>
-      <mc:AlternateContent xmlns:mc="http://schemas.openxmlformats.org/markup-compatibility/2006" xmlns:a14="http://schemas.microsoft.com/office/drawing/2010/main">
-        <mc:Choice Requires="a14">
+      <mc:AlternateContent xmlns:mc="http://schemas.openxmlformats.org/markup-compatibility/2006">
+        <mc:Choice xmlns:a14="http://schemas.microsoft.com/office/drawing/2010/main" Requires="a14">
           <p:sp>
             <p:nvSpPr>
               <p:cNvPr id="7" name="TextBox 6">
@@ -26382,7 +26491,7 @@
             <p:spPr>
               <a:xfrm>
                 <a:off x="267296" y="693144"/>
-                <a:ext cx="9836824" cy="5632311"/>
+                <a:ext cx="10888384" cy="6247864"/>
               </a:xfrm>
               <a:prstGeom prst="rect">
                 <a:avLst/>
@@ -26396,7 +26505,7 @@
               <a:lstStyle/>
               <a:p>
                 <a:r>
-                  <a:rPr lang="en-US" b="1" dirty="0">
+                  <a:rPr lang="en-US" sz="2000" b="1" dirty="0">
                     <a:solidFill>
                       <a:schemeClr val="accent6">
                         <a:lumMod val="60000"/>
@@ -26407,7 +26516,7 @@
                   <a:t>Problem: </a:t>
                 </a:r>
                 <a:r>
-                  <a:rPr lang="en-US" dirty="0">
+                  <a:rPr lang="en-US" sz="2000" dirty="0">
                     <a:solidFill>
                       <a:schemeClr val="accent6">
                         <a:lumMod val="60000"/>
@@ -26420,7 +26529,7 @@
               </a:p>
               <a:p>
                 <a:r>
-                  <a:rPr lang="en-US" dirty="0">
+                  <a:rPr lang="en-US" sz="2000" dirty="0">
                     <a:solidFill>
                       <a:schemeClr val="accent6">
                         <a:lumMod val="60000"/>
@@ -26431,7 +26540,7 @@
                   <a:t>What is the probability that is it multiple of 2 </a:t>
                 </a:r>
                 <a:r>
-                  <a:rPr lang="en-US" b="1" dirty="0">
+                  <a:rPr lang="en-US" sz="2000" b="1" dirty="0">
                     <a:solidFill>
                       <a:schemeClr val="accent6">
                         <a:lumMod val="60000"/>
@@ -26442,7 +26551,7 @@
                   <a:t>or </a:t>
                 </a:r>
                 <a:r>
-                  <a:rPr lang="en-US" dirty="0">
+                  <a:rPr lang="en-US" sz="2000" dirty="0">
                     <a:solidFill>
                       <a:schemeClr val="accent6">
                         <a:lumMod val="60000"/>
@@ -26457,7 +26566,7 @@
                 <a:pPr marL="514350" indent="-514350">
                   <a:buAutoNum type="arabicParenR"/>
                 </a:pPr>
-                <a:endParaRPr lang="en-US" b="1" dirty="0">
+                <a:endParaRPr lang="en-US" sz="2000" b="1" dirty="0">
                   <a:solidFill>
                     <a:schemeClr val="accent6">
                       <a:lumMod val="60000"/>
@@ -26468,7 +26577,7 @@
               </a:p>
               <a:p>
                 <a:r>
-                  <a:rPr lang="en-US" b="1" dirty="0">
+                  <a:rPr lang="en-US" sz="2000" b="1" dirty="0">
                     <a:solidFill>
                       <a:schemeClr val="accent6">
                         <a:lumMod val="60000"/>
@@ -26479,7 +26588,7 @@
                   <a:t>Ans: </a:t>
                 </a:r>
                 <a:r>
-                  <a:rPr lang="en-US" dirty="0">
+                  <a:rPr lang="en-US" sz="2000" dirty="0">
                     <a:solidFill>
                       <a:schemeClr val="accent6">
                         <a:lumMod val="60000"/>
@@ -26492,7 +26601,7 @@
                 <a14:m>
                   <m:oMath xmlns:m="http://schemas.openxmlformats.org/officeDocument/2006/math">
                     <m:r>
-                      <a:rPr lang="en-US" b="1" i="1" dirty="0">
+                      <a:rPr lang="en-US" sz="2000" b="1" i="1" dirty="0">
                         <a:solidFill>
                           <a:schemeClr val="accent6">
                             <a:lumMod val="60000"/>
@@ -26506,7 +26615,7 @@
                   </m:oMath>
                 </a14:m>
                 <a:r>
-                  <a:rPr lang="en-US" b="1" dirty="0">
+                  <a:rPr lang="en-US" sz="2000" b="1" dirty="0">
                     <a:solidFill>
                       <a:schemeClr val="accent6">
                         <a:lumMod val="60000"/>
@@ -26517,7 +26626,7 @@
                   <a:t> = </a:t>
                 </a:r>
                 <a:r>
-                  <a:rPr lang="en-US" dirty="0">
+                  <a:rPr lang="en-US" sz="2000" dirty="0">
                     <a:solidFill>
                       <a:schemeClr val="accent6">
                         <a:lumMod val="60000"/>
@@ -26527,7 +26636,7 @@
                   </a:rPr>
                   <a:t>{1, 2, 3, 4, 5, 6, 7, 8, 9, 10, 11, 12, 13}</a:t>
                 </a:r>
-                <a:endParaRPr lang="en-US" b="1" dirty="0">
+                <a:endParaRPr lang="en-US" sz="2000" b="1" dirty="0">
                   <a:solidFill>
                     <a:schemeClr val="accent6">
                       <a:lumMod val="60000"/>
@@ -26538,7 +26647,7 @@
               </a:p>
               <a:p>
                 <a:r>
-                  <a:rPr lang="en-US" dirty="0">
+                  <a:rPr lang="en-US" sz="2000" dirty="0">
                     <a:solidFill>
                       <a:schemeClr val="accent6">
                         <a:lumMod val="60000"/>
@@ -26548,7 +26657,7 @@
                   </a:rPr>
                   <a:t>Let</a:t>
                 </a:r>
-                <a:endParaRPr lang="en-US" b="1" dirty="0">
+                <a:endParaRPr lang="en-US" sz="2000" b="1" dirty="0">
                   <a:solidFill>
                     <a:schemeClr val="accent6">
                       <a:lumMod val="60000"/>
@@ -26559,7 +26668,7 @@
               </a:p>
               <a:p>
                 <a:r>
-                  <a:rPr lang="en-US" dirty="0">
+                  <a:rPr lang="en-US" sz="2000" dirty="0">
                     <a:solidFill>
                       <a:schemeClr val="accent6">
                         <a:lumMod val="60000"/>
@@ -26572,7 +26681,7 @@
               </a:p>
               <a:p>
                 <a:r>
-                  <a:rPr lang="en-US" dirty="0">
+                  <a:rPr lang="en-US" sz="2000" dirty="0">
                     <a:solidFill>
                       <a:schemeClr val="accent6">
                         <a:lumMod val="60000"/>
@@ -26584,7 +26693,7 @@
                 </a:r>
               </a:p>
               <a:p>
-                <a:endParaRPr lang="en-US" dirty="0">
+                <a:endParaRPr lang="en-US" sz="2000" dirty="0">
                   <a:solidFill>
                     <a:schemeClr val="accent6">
                       <a:lumMod val="60000"/>
@@ -26595,7 +26704,7 @@
               </a:p>
               <a:p>
                 <a:r>
-                  <a:rPr lang="en-US" dirty="0">
+                  <a:rPr lang="en-US" sz="2000" dirty="0">
                     <a:solidFill>
                       <a:schemeClr val="accent6">
                         <a:lumMod val="60000"/>
@@ -26607,7 +26716,7 @@
                 </a:r>
               </a:p>
               <a:p>
-                <a:endParaRPr lang="en-US" dirty="0">
+                <a:endParaRPr lang="en-US" sz="2000" dirty="0">
                   <a:solidFill>
                     <a:schemeClr val="accent6">
                       <a:lumMod val="60000"/>
@@ -26618,7 +26727,7 @@
               </a:p>
               <a:p>
                 <a:r>
-                  <a:rPr lang="en-US" b="1" dirty="0">
+                  <a:rPr lang="en-US" sz="2000" b="1" dirty="0">
                     <a:solidFill>
                       <a:schemeClr val="accent6">
                         <a:lumMod val="60000"/>
@@ -26631,7 +26740,7 @@
                 <a14:m>
                   <m:oMath xmlns:m="http://schemas.openxmlformats.org/officeDocument/2006/math">
                     <m:r>
-                      <a:rPr lang="en-US" b="1">
+                      <a:rPr lang="en-US" sz="2000" b="1">
                         <a:solidFill>
                           <a:schemeClr val="accent6">
                             <a:lumMod val="60000"/>
@@ -26645,7 +26754,7 @@
                   </m:oMath>
                 </a14:m>
                 <a:r>
-                  <a:rPr lang="en-US" b="1" dirty="0">
+                  <a:rPr lang="en-US" sz="2000" b="1" dirty="0">
                     <a:solidFill>
                       <a:schemeClr val="accent6">
                         <a:lumMod val="60000"/>
@@ -26656,7 +26765,7 @@
                   <a:t> B </a:t>
                 </a:r>
                 <a:r>
-                  <a:rPr lang="en-US" dirty="0">
+                  <a:rPr lang="en-US" sz="2000" dirty="0">
                     <a:solidFill>
                       <a:schemeClr val="accent6">
                         <a:lumMod val="60000"/>
@@ -26667,7 +26776,7 @@
                   <a:t>= numbers that are multiple of 2 </a:t>
                 </a:r>
                 <a:r>
-                  <a:rPr lang="en-US" b="1" u="sng" dirty="0">
+                  <a:rPr lang="en-US" sz="2000" b="1" u="sng" dirty="0">
                     <a:solidFill>
                       <a:schemeClr val="accent6">
                         <a:lumMod val="60000"/>
@@ -26678,7 +26787,7 @@
                   <a:t>and</a:t>
                 </a:r>
                 <a:r>
-                  <a:rPr lang="en-US" dirty="0">
+                  <a:rPr lang="en-US" sz="2000" dirty="0">
                     <a:solidFill>
                       <a:schemeClr val="accent6">
                         <a:lumMod val="60000"/>
@@ -26689,7 +26798,7 @@
                   <a:t> 3 = </a:t>
                 </a:r>
                 <a:r>
-                  <a:rPr lang="en-US" b="1" dirty="0">
+                  <a:rPr lang="en-US" sz="2000" b="1" dirty="0">
                     <a:solidFill>
                       <a:schemeClr val="accent6">
                         <a:lumMod val="60000"/>
@@ -26701,7 +26810,7 @@
                 </a:r>
               </a:p>
               <a:p>
-                <a:endParaRPr lang="en-US" b="1" dirty="0">
+                <a:endParaRPr lang="en-US" sz="2000" b="1" dirty="0">
                   <a:solidFill>
                     <a:schemeClr val="accent6">
                       <a:lumMod val="60000"/>
@@ -26712,7 +26821,7 @@
               </a:p>
               <a:p>
                 <a:r>
-                  <a:rPr lang="en-US" dirty="0">
+                  <a:rPr lang="en-US" sz="2000" dirty="0">
                     <a:solidFill>
                       <a:schemeClr val="accent6">
                         <a:lumMod val="60000"/>
@@ -26725,7 +26834,7 @@
                 <a14:m>
                   <m:oMath xmlns:m="http://schemas.openxmlformats.org/officeDocument/2006/math">
                     <m:r>
-                      <a:rPr lang="en-US">
+                      <a:rPr lang="en-US" sz="2000">
                         <a:solidFill>
                           <a:schemeClr val="accent6">
                             <a:lumMod val="60000"/>
@@ -26739,7 +26848,7 @@
                   </m:oMath>
                 </a14:m>
                 <a:r>
-                  <a:rPr lang="en-US" dirty="0">
+                  <a:rPr lang="en-US" sz="2000" dirty="0">
                     <a:solidFill>
                       <a:schemeClr val="accent6">
                         <a:lumMod val="60000"/>
@@ -26751,7 +26860,7 @@
                 </a:r>
               </a:p>
               <a:p>
-                <a:endParaRPr lang="en-US" dirty="0">
+                <a:endParaRPr lang="en-US" sz="2000" dirty="0">
                   <a:solidFill>
                     <a:schemeClr val="accent6">
                       <a:lumMod val="60000"/>
@@ -26762,7 +26871,7 @@
               </a:p>
               <a:p>
                 <a:r>
-                  <a:rPr lang="en-US" dirty="0">
+                  <a:rPr lang="en-US" sz="2000" dirty="0">
                     <a:solidFill>
                       <a:schemeClr val="accent6">
                         <a:lumMod val="60000"/>
@@ -26775,7 +26884,7 @@
                 <a14:m>
                   <m:oMath xmlns:m="http://schemas.openxmlformats.org/officeDocument/2006/math">
                     <m:r>
-                      <a:rPr lang="en-US" b="0">
+                      <a:rPr lang="en-US" sz="2000" b="0">
                         <a:solidFill>
                           <a:schemeClr val="accent6">
                             <a:lumMod val="60000"/>
@@ -26789,7 +26898,7 @@
                   </m:oMath>
                 </a14:m>
                 <a:r>
-                  <a:rPr lang="en-US" dirty="0">
+                  <a:rPr lang="en-US" sz="2000" dirty="0">
                     <a:solidFill>
                       <a:schemeClr val="accent6">
                         <a:lumMod val="60000"/>
@@ -26801,7 +26910,7 @@
                 </a:r>
               </a:p>
               <a:p>
-                <a:endParaRPr lang="en-US" b="1" dirty="0">
+                <a:endParaRPr lang="en-US" sz="2000" b="1" dirty="0">
                   <a:solidFill>
                     <a:schemeClr val="accent6">
                       <a:lumMod val="60000"/>
@@ -26812,7 +26921,7 @@
               </a:p>
               <a:p>
                 <a:r>
-                  <a:rPr lang="en-US" b="1" dirty="0">
+                  <a:rPr lang="en-US" sz="2000" b="1" dirty="0">
                     <a:solidFill>
                       <a:schemeClr val="accent6">
                         <a:lumMod val="60000"/>
@@ -26823,7 +26932,7 @@
                   <a:t>                        </a:t>
                 </a:r>
                 <a:r>
-                  <a:rPr lang="en-US" dirty="0">
+                  <a:rPr lang="en-US" sz="2000" dirty="0">
                     <a:solidFill>
                       <a:schemeClr val="accent6">
                         <a:lumMod val="60000"/>
@@ -26834,7 +26943,7 @@
                   <a:t>= 6/13 +  4/13   </a:t>
                 </a:r>
                 <a:r>
-                  <a:rPr lang="en-US" b="1" dirty="0">
+                  <a:rPr lang="en-US" sz="2000" b="1" dirty="0">
                     <a:solidFill>
                       <a:schemeClr val="accent6">
                         <a:lumMod val="60000"/>
@@ -26845,7 +26954,7 @@
                   <a:t>–</a:t>
                 </a:r>
                 <a:r>
-                  <a:rPr lang="en-US" dirty="0">
+                  <a:rPr lang="en-US" sz="2000" dirty="0">
                     <a:solidFill>
                       <a:schemeClr val="accent6">
                         <a:lumMod val="60000"/>
@@ -26858,7 +26967,7 @@
               </a:p>
               <a:p>
                 <a:r>
-                  <a:rPr lang="en-US" dirty="0">
+                  <a:rPr lang="en-US" sz="2000" dirty="0">
                     <a:solidFill>
                       <a:schemeClr val="accent6">
                         <a:lumMod val="60000"/>
@@ -26871,7 +26980,7 @@
               </a:p>
               <a:p>
                 <a:r>
-                  <a:rPr lang="en-US" dirty="0">
+                  <a:rPr lang="en-US" sz="2000" dirty="0">
                     <a:solidFill>
                       <a:schemeClr val="accent6">
                         <a:lumMod val="60000"/>
@@ -26883,7 +26992,7 @@
                 </a:r>
               </a:p>
               <a:p>
-                <a:endParaRPr lang="en-US" b="1" dirty="0">
+                <a:endParaRPr lang="en-US" sz="2000" b="1" dirty="0">
                   <a:solidFill>
                     <a:schemeClr val="accent6">
                       <a:lumMod val="60000"/>
@@ -26895,7 +27004,7 @@
             </p:txBody>
           </p:sp>
         </mc:Choice>
-        <mc:Fallback xmlns="">
+        <mc:Fallback>
           <p:sp>
             <p:nvSpPr>
               <p:cNvPr id="7" name="TextBox 6">
@@ -26913,7 +27022,7 @@
             <p:spPr>
               <a:xfrm>
                 <a:off x="267296" y="693144"/>
-                <a:ext cx="9836824" cy="5632311"/>
+                <a:ext cx="10888384" cy="6247864"/>
               </a:xfrm>
               <a:prstGeom prst="rect">
                 <a:avLst/>
@@ -26921,7 +27030,7 @@
               <a:blipFill>
                 <a:blip r:embed="rId3"/>
                 <a:stretch>
-                  <a:fillRect l="-558" t="-649"/>
+                  <a:fillRect l="-616" t="-585"/>
                 </a:stretch>
               </a:blipFill>
             </p:spPr>
@@ -26962,7 +27071,7 @@
         </p:blipFill>
         <p:spPr>
           <a:xfrm>
-            <a:off x="7468359" y="2962656"/>
+            <a:off x="7437886" y="3319272"/>
             <a:ext cx="4723641" cy="2598002"/>
           </a:xfrm>
           <a:prstGeom prst="rect">
